--- a/slides/Chapter 17 - Energy Water and the Environment (Lecture Deck).pptx
+++ b/slides/Chapter 17 - Energy Water and the Environment (Lecture Deck).pptx
@@ -8428,12 +8428,12 @@
         </p:nvSpPr>
         <p:spPr>
           <a:xfrm>
-            <a:off x="594360" y="5760720"/>
-            <a:ext cx="11002975" cy="685800"/>
+            <a:off x="594360" y="5696712"/>
+            <a:ext cx="11002975" cy="749808"/>
           </a:xfrm>
           <a:prstGeom prst="roundRect">
             <a:avLst>
-              <a:gd name="adj" fmla="val 9333"/>
+              <a:gd name="adj" fmla="val 8537"/>
             </a:avLst>
           </a:prstGeom>
           <a:solidFill>
@@ -8455,7 +8455,7 @@
         </p:nvSpPr>
         <p:spPr>
           <a:xfrm>
-            <a:off x="868680" y="5925312"/>
+            <a:off x="868680" y="5861304"/>
             <a:ext cx="10454335" cy="329184"/>
           </a:xfrm>
           <a:prstGeom prst="rect">
@@ -8494,8 +8494,8 @@
         </p:nvSpPr>
         <p:spPr>
           <a:xfrm>
-            <a:off x="868680" y="6291072"/>
-            <a:ext cx="10454335" cy="-27432"/>
+            <a:off x="868680" y="6227064"/>
+            <a:ext cx="10454335" cy="201168"/>
           </a:xfrm>
           <a:prstGeom prst="rect">
             <a:avLst/>
@@ -10004,92 +10004,6 @@
           </a:p>
         </p:txBody>
       </p:sp>
-      <p:sp>
-        <p:nvSpPr>
-          <p:cNvPr id="14" name="Shape 11"/>
-          <p:cNvSpPr/>
-          <p:nvPr/>
-        </p:nvSpPr>
-        <p:spPr>
-          <a:xfrm>
-            <a:off x="594360" y="5897880"/>
-            <a:ext cx="11002975" cy="548640"/>
-          </a:xfrm>
-          <a:prstGeom prst="roundRect">
-            <a:avLst>
-              <a:gd name="adj" fmla="val 11667"/>
-            </a:avLst>
-          </a:prstGeom>
-          <a:solidFill>
-            <a:srgbClr val="FFFFFF"/>
-          </a:solidFill>
-          <a:ln w="19050">
-            <a:solidFill>
-              <a:srgbClr val="B07D2B"/>
-            </a:solidFill>
-            <a:prstDash val="solid"/>
-          </a:ln>
-        </p:spPr>
-      </p:sp>
-      <p:sp>
-        <p:nvSpPr>
-          <p:cNvPr id="15" name="Text 12"/>
-          <p:cNvSpPr txBox="1"/>
-          <p:nvPr/>
-        </p:nvSpPr>
-        <p:spPr>
-          <a:xfrm>
-            <a:off x="868680" y="6062472"/>
-            <a:ext cx="10454335" cy="329184"/>
-          </a:xfrm>
-          <a:prstGeom prst="rect">
-            <a:avLst/>
-          </a:prstGeom>
-          <a:noFill/>
-          <a:ln/>
-        </p:spPr>
-        <p:txBody>
-          <a:bodyPr wrap="square" lIns="0" tIns="0" rIns="0" bIns="0" rtlCol="0" anchor="ctr"/>
-          <a:lstStyle/>
-          <a:p>
-            <a:pPr indent="0" marL="0">
-              <a:buNone/>
-            </a:pPr>
-            <a:endParaRPr lang="en-US" sz="1400" dirty="0"/>
-          </a:p>
-        </p:txBody>
-      </p:sp>
-      <p:sp>
-        <p:nvSpPr>
-          <p:cNvPr id="16" name="Text 13"/>
-          <p:cNvSpPr txBox="1"/>
-          <p:nvPr/>
-        </p:nvSpPr>
-        <p:spPr>
-          <a:xfrm>
-            <a:off x="868680" y="6428232"/>
-            <a:ext cx="10454335" cy="-164592"/>
-          </a:xfrm>
-          <a:prstGeom prst="rect">
-            <a:avLst/>
-          </a:prstGeom>
-          <a:noFill/>
-          <a:ln/>
-        </p:spPr>
-        <p:txBody>
-          <a:bodyPr wrap="square" lIns="0" tIns="0" rIns="0" bIns="0" rtlCol="0" anchor="ctr"/>
-          <a:lstStyle/>
-          <a:p>
-            <a:pPr indent="0" marL="0">
-              <a:lnSpc>
-                <a:spcPts val="1700"/>
-              </a:lnSpc>
-              <a:buNone/>
-            </a:pPr>
-            <a:endParaRPr lang="en-US" sz="1250" dirty="0"/>
-          </a:p>
-        </p:txBody>
-      </p:sp>
     </p:spTree>
   </p:cSld>
   <p:clrMapOvr>
@@ -11126,7 +11040,7 @@
         <p:spPr>
           <a:xfrm>
             <a:off x="868680" y="6108192"/>
-            <a:ext cx="10454335" cy="155448"/>
+            <a:ext cx="10454335" cy="201168"/>
           </a:xfrm>
           <a:prstGeom prst="rect">
             <a:avLst/>

--- a/slides/Chapter 17 - Energy Water and the Environment (Lecture Deck).pptx
+++ b/slides/Chapter 17 - Energy Water and the Environment (Lecture Deck).pptx
@@ -716,7 +716,7 @@
             <a:r>
               <a:rPr lang="en-US" dirty="0"/>
               <a:t>TIMING: 6 minutes.
-THE 71 PERCENT NUMBER IS THE STORY. In a state where most issues split sharply,
+THE 70 PERCENT NUMBER IS THE STORY. In a state where most issues split sharply,
 water funding drew support across the political spectrum. Ask students why. The
 usual answer is that water scarcity is concrete, visible, and affects agriculture,
 cities, and industry alike, so the coalition is broad.
@@ -3767,7 +3767,7 @@
                 <a:ea typeface="Calibri" pitchFamily="34" charset="-122"/>
                 <a:cs typeface="Calibri" pitchFamily="34" charset="-120"/>
               </a:rPr>
-              <a:t>Voters approved dedicating up to $1 billion a year of existing sales tax revenue to the Texas Water Fund for twenty years, passing with roughly 71 percent support.</a:t>
+              <a:t>Voters approved dedicating up to $1 billion a year of existing sales tax revenue to the Texas Water Fund for twenty years, passing with about 70 percent support (70.4%).</a:t>
             </a:r>
             <a:endParaRPr lang="en-US" sz="1200" dirty="0"/>
           </a:p>
@@ -3806,7 +3806,7 @@
                 <a:ea typeface="Calibri" pitchFamily="34" charset="-122"/>
                 <a:cs typeface="Calibri" pitchFamily="34" charset="-120"/>
               </a:rPr>
-              <a:t>Seventy-one percent approval is unusual in Texas politics. Water is one of the few issues where the coalition is not partisan.</a:t>
+              <a:t>Seventy percent approval is unusual in Texas politics. Water is one of the few issues where the coalition is not partisan.</a:t>
             </a:r>
             <a:endParaRPr lang="en-US" sz="1250" dirty="0"/>
           </a:p>
@@ -4743,7 +4743,7 @@
                 <a:ea typeface="Calibri" pitchFamily="34" charset="-122"/>
                 <a:cs typeface="Calibri" pitchFamily="34" charset="-120"/>
               </a:rPr>
-              <a:t>Water funding passed with 71 percent support while energy and environmental questions split Texans sharply. What makes an issue capable of building that kind of coalition?</a:t>
+              <a:t>Water funding passed with 70 percent support while energy and environmental questions split Texans sharply. What makes an issue capable of building that kind of coalition?</a:t>
             </a:r>
             <a:endParaRPr lang="en-US" sz="1600" dirty="0"/>
           </a:p>
@@ -8330,7 +8330,7 @@
                 <a:ea typeface="Calibri" pitchFamily="34" charset="-122"/>
                 <a:cs typeface="Calibri" pitchFamily="34" charset="-120"/>
               </a:rPr>
-              <a:t>The Public Utility Commission of Texas, whose three commissioners are appointed by the governor, oversees ERCOT. The Legislature sets the statutory framework.</a:t>
+              <a:t>The Public Utility Commission of Texas, whose five commissioners are appointed by the governor with Senate consent, oversees ERCOT. The Legislature sets the statutory framework.</a:t>
             </a:r>
             <a:endParaRPr lang="en-US" sz="1200" dirty="0"/>
           </a:p>

--- a/slides/Chapter 17 - Energy Water and the Environment (Lecture Deck).pptx
+++ b/slides/Chapter 17 - Energy Water and the Environment (Lecture Deck).pptx
@@ -3767,7 +3767,7 @@
                 <a:ea typeface="Calibri" pitchFamily="34" charset="-122"/>
                 <a:cs typeface="Calibri" pitchFamily="34" charset="-120"/>
               </a:rPr>
-              <a:t>Voters approved dedicating up to $1 billion a year of existing sales tax revenue to the Texas Water Fund for twenty years, passing with about 70 percent support (70.4%).</a:t>
+              <a:t>Voters approved dedicating up to $1 billion a year of existing sales tax revenue to the Texas Water Fund for twenty years, passing with about 70 percent support.</a:t>
             </a:r>
             <a:endParaRPr lang="en-US" sz="1200" dirty="0"/>
           </a:p>
